--- a/Final/Figures/OAM_wavefront.pptx
+++ b/Final/Figures/OAM_wavefront.pptx
@@ -2,13 +2,13 @@
 <file path=ppt/presentation.xml><?xml version="1.0" encoding="utf-8"?>
 <p:presentation xmlns:a="http://schemas.openxmlformats.org/drawingml/2006/main" xmlns:r="http://schemas.openxmlformats.org/officeDocument/2006/relationships" xmlns:p="http://schemas.openxmlformats.org/presentationml/2006/main" saveSubsetFonts="1">
   <p:sldMasterIdLst>
-    <p:sldMasterId id="2147483672" r:id="rId1"/>
+    <p:sldMasterId id="2147483708" r:id="rId1"/>
   </p:sldMasterIdLst>
   <p:sldIdLst>
     <p:sldId id="256" r:id="rId2"/>
     <p:sldId id="257" r:id="rId3"/>
   </p:sldIdLst>
-  <p:sldSz cx="12192000" cy="2519363"/>
+  <p:sldSz cx="10799763" cy="1979613"/>
   <p:notesSz cx="6858000" cy="9144000"/>
   <p:defaultTextStyle>
     <a:defPPr>
@@ -105,6 +105,11 @@
       </a:defRPr>
     </a:lvl9pPr>
   </p:defaultTextStyle>
+  <p:extLst>
+    <p:ext uri="{EFAFB233-063F-42B5-8137-9DF3F51BA10A}">
+      <p15:sldGuideLst xmlns:p15="http://schemas.microsoft.com/office/powerpoint/2012/main"/>
+    </p:ext>
+  </p:extLst>
 </p:presentation>
 </file>
 
@@ -137,15 +142,15 @@
         </p:nvSpPr>
         <p:spPr>
           <a:xfrm>
-            <a:off x="1524000" y="412312"/>
-            <a:ext cx="9144000" cy="877112"/>
+            <a:off x="1349971" y="323978"/>
+            <a:ext cx="8099822" cy="689199"/>
           </a:xfrm>
         </p:spPr>
         <p:txBody>
           <a:bodyPr anchor="b"/>
           <a:lstStyle>
             <a:lvl1pPr algn="ctr">
-              <a:defRPr sz="2204"/>
+              <a:defRPr sz="1732"/>
             </a:lvl1pPr>
           </a:lstStyle>
           <a:p>
@@ -169,8 +174,8 @@
         </p:nvSpPr>
         <p:spPr>
           <a:xfrm>
-            <a:off x="1524000" y="1323249"/>
-            <a:ext cx="9144000" cy="608263"/>
+            <a:off x="1349971" y="1039755"/>
+            <a:ext cx="8099822" cy="477948"/>
           </a:xfrm>
         </p:spPr>
         <p:txBody>
@@ -178,39 +183,39 @@
           <a:lstStyle>
             <a:lvl1pPr marL="0" indent="0" algn="ctr">
               <a:buNone/>
-              <a:defRPr sz="882"/>
+              <a:defRPr sz="693"/>
             </a:lvl1pPr>
-            <a:lvl2pPr marL="167975" indent="0" algn="ctr">
-              <a:buNone/>
-              <a:defRPr sz="735"/>
+            <a:lvl2pPr marL="131994" indent="0" algn="ctr">
+              <a:buNone/>
+              <a:defRPr sz="577"/>
             </a:lvl2pPr>
-            <a:lvl3pPr marL="335951" indent="0" algn="ctr">
-              <a:buNone/>
-              <a:defRPr sz="661"/>
+            <a:lvl3pPr marL="263987" indent="0" algn="ctr">
+              <a:buNone/>
+              <a:defRPr sz="520"/>
             </a:lvl3pPr>
-            <a:lvl4pPr marL="503926" indent="0" algn="ctr">
-              <a:buNone/>
-              <a:defRPr sz="588"/>
+            <a:lvl4pPr marL="395981" indent="0" algn="ctr">
+              <a:buNone/>
+              <a:defRPr sz="462"/>
             </a:lvl4pPr>
-            <a:lvl5pPr marL="671901" indent="0" algn="ctr">
-              <a:buNone/>
-              <a:defRPr sz="588"/>
+            <a:lvl5pPr marL="527975" indent="0" algn="ctr">
+              <a:buNone/>
+              <a:defRPr sz="462"/>
             </a:lvl5pPr>
-            <a:lvl6pPr marL="839876" indent="0" algn="ctr">
-              <a:buNone/>
-              <a:defRPr sz="588"/>
+            <a:lvl6pPr marL="659968" indent="0" algn="ctr">
+              <a:buNone/>
+              <a:defRPr sz="462"/>
             </a:lvl6pPr>
-            <a:lvl7pPr marL="1007852" indent="0" algn="ctr">
-              <a:buNone/>
-              <a:defRPr sz="588"/>
+            <a:lvl7pPr marL="791962" indent="0" algn="ctr">
+              <a:buNone/>
+              <a:defRPr sz="462"/>
             </a:lvl7pPr>
-            <a:lvl8pPr marL="1175827" indent="0" algn="ctr">
-              <a:buNone/>
-              <a:defRPr sz="588"/>
+            <a:lvl8pPr marL="923955" indent="0" algn="ctr">
+              <a:buNone/>
+              <a:defRPr sz="462"/>
             </a:lvl8pPr>
-            <a:lvl9pPr marL="1343802" indent="0" algn="ctr">
-              <a:buNone/>
-              <a:defRPr sz="588"/>
+            <a:lvl9pPr marL="1055949" indent="0" algn="ctr">
+              <a:buNone/>
+              <a:defRPr sz="462"/>
             </a:lvl9pPr>
           </a:lstStyle>
           <a:p>
@@ -239,7 +244,7 @@
           <a:p>
             <a:fld id="{59A742F1-1304-4C54-862D-C54330E4275F}" type="datetimeFigureOut">
               <a:rPr lang="zh-TW" altLang="en-US" smtClean="0"/>
-              <a:t>2026/3/23</a:t>
+              <a:t>2026/4/20</a:t>
             </a:fld>
             <a:endParaRPr lang="zh-TW" altLang="en-US"/>
           </a:p>
@@ -290,7 +295,7 @@
     </p:spTree>
     <p:extLst>
       <p:ext uri="{BB962C8B-B14F-4D97-AF65-F5344CB8AC3E}">
-        <p14:creationId xmlns:p14="http://schemas.microsoft.com/office/powerpoint/2010/main" val="473931933"/>
+        <p14:creationId xmlns:p14="http://schemas.microsoft.com/office/powerpoint/2010/main" val="970802121"/>
       </p:ext>
     </p:extLst>
   </p:cSld>
@@ -409,7 +414,7 @@
           <a:p>
             <a:fld id="{59A742F1-1304-4C54-862D-C54330E4275F}" type="datetimeFigureOut">
               <a:rPr lang="zh-TW" altLang="en-US" smtClean="0"/>
-              <a:t>2026/3/23</a:t>
+              <a:t>2026/4/20</a:t>
             </a:fld>
             <a:endParaRPr lang="zh-TW" altLang="en-US"/>
           </a:p>
@@ -460,7 +465,7 @@
     </p:spTree>
     <p:extLst>
       <p:ext uri="{BB962C8B-B14F-4D97-AF65-F5344CB8AC3E}">
-        <p14:creationId xmlns:p14="http://schemas.microsoft.com/office/powerpoint/2010/main" val="565800914"/>
+        <p14:creationId xmlns:p14="http://schemas.microsoft.com/office/powerpoint/2010/main" val="3087070417"/>
       </p:ext>
     </p:extLst>
   </p:cSld>
@@ -499,8 +504,8 @@
         </p:nvSpPr>
         <p:spPr>
           <a:xfrm>
-            <a:off x="8724900" y="134133"/>
-            <a:ext cx="2628900" cy="2135044"/>
+            <a:off x="7728580" y="105396"/>
+            <a:ext cx="2328699" cy="1677631"/>
           </a:xfrm>
         </p:spPr>
         <p:txBody>
@@ -527,8 +532,8 @@
         </p:nvSpPr>
         <p:spPr>
           <a:xfrm>
-            <a:off x="838200" y="134133"/>
-            <a:ext cx="7734300" cy="2135044"/>
+            <a:off x="742484" y="105396"/>
+            <a:ext cx="6851100" cy="1677631"/>
           </a:xfrm>
         </p:spPr>
         <p:txBody>
@@ -589,7 +594,7 @@
           <a:p>
             <a:fld id="{59A742F1-1304-4C54-862D-C54330E4275F}" type="datetimeFigureOut">
               <a:rPr lang="zh-TW" altLang="en-US" smtClean="0"/>
-              <a:t>2026/3/23</a:t>
+              <a:t>2026/4/20</a:t>
             </a:fld>
             <a:endParaRPr lang="zh-TW" altLang="en-US"/>
           </a:p>
@@ -640,7 +645,7 @@
     </p:spTree>
     <p:extLst>
       <p:ext uri="{BB962C8B-B14F-4D97-AF65-F5344CB8AC3E}">
-        <p14:creationId xmlns:p14="http://schemas.microsoft.com/office/powerpoint/2010/main" val="2274099404"/>
+        <p14:creationId xmlns:p14="http://schemas.microsoft.com/office/powerpoint/2010/main" val="1551167001"/>
       </p:ext>
     </p:extLst>
   </p:cSld>
@@ -759,7 +764,7 @@
           <a:p>
             <a:fld id="{59A742F1-1304-4C54-862D-C54330E4275F}" type="datetimeFigureOut">
               <a:rPr lang="zh-TW" altLang="en-US" smtClean="0"/>
-              <a:t>2026/3/23</a:t>
+              <a:t>2026/4/20</a:t>
             </a:fld>
             <a:endParaRPr lang="zh-TW" altLang="en-US"/>
           </a:p>
@@ -810,7 +815,7 @@
     </p:spTree>
     <p:extLst>
       <p:ext uri="{BB962C8B-B14F-4D97-AF65-F5344CB8AC3E}">
-        <p14:creationId xmlns:p14="http://schemas.microsoft.com/office/powerpoint/2010/main" val="389602204"/>
+        <p14:creationId xmlns:p14="http://schemas.microsoft.com/office/powerpoint/2010/main" val="1878170901"/>
       </p:ext>
     </p:extLst>
   </p:cSld>
@@ -849,15 +854,15 @@
         </p:nvSpPr>
         <p:spPr>
           <a:xfrm>
-            <a:off x="831850" y="628091"/>
-            <a:ext cx="10515600" cy="1047985"/>
+            <a:off x="736859" y="493529"/>
+            <a:ext cx="9314796" cy="823464"/>
           </a:xfrm>
         </p:spPr>
         <p:txBody>
           <a:bodyPr anchor="b"/>
           <a:lstStyle>
             <a:lvl1pPr>
-              <a:defRPr sz="2204"/>
+              <a:defRPr sz="1732"/>
             </a:lvl1pPr>
           </a:lstStyle>
           <a:p>
@@ -881,8 +886,8 @@
         </p:nvSpPr>
         <p:spPr>
           <a:xfrm>
-            <a:off x="831850" y="1685991"/>
-            <a:ext cx="10515600" cy="551110"/>
+            <a:off x="736859" y="1324783"/>
+            <a:ext cx="9314796" cy="433040"/>
           </a:xfrm>
         </p:spPr>
         <p:txBody>
@@ -890,7 +895,7 @@
           <a:lstStyle>
             <a:lvl1pPr marL="0" indent="0">
               <a:buNone/>
-              <a:defRPr sz="882">
+              <a:defRPr sz="693">
                 <a:solidFill>
                   <a:schemeClr val="tx1">
                     <a:tint val="75000"/>
@@ -898,9 +903,9 @@
                 </a:solidFill>
               </a:defRPr>
             </a:lvl1pPr>
-            <a:lvl2pPr marL="167975" indent="0">
-              <a:buNone/>
-              <a:defRPr sz="735">
+            <a:lvl2pPr marL="131994" indent="0">
+              <a:buNone/>
+              <a:defRPr sz="577">
                 <a:solidFill>
                   <a:schemeClr val="tx1">
                     <a:tint val="75000"/>
@@ -908,9 +913,9 @@
                 </a:solidFill>
               </a:defRPr>
             </a:lvl2pPr>
-            <a:lvl3pPr marL="335951" indent="0">
-              <a:buNone/>
-              <a:defRPr sz="661">
+            <a:lvl3pPr marL="263987" indent="0">
+              <a:buNone/>
+              <a:defRPr sz="520">
                 <a:solidFill>
                   <a:schemeClr val="tx1">
                     <a:tint val="75000"/>
@@ -918,9 +923,9 @@
                 </a:solidFill>
               </a:defRPr>
             </a:lvl3pPr>
-            <a:lvl4pPr marL="503926" indent="0">
-              <a:buNone/>
-              <a:defRPr sz="588">
+            <a:lvl4pPr marL="395981" indent="0">
+              <a:buNone/>
+              <a:defRPr sz="462">
                 <a:solidFill>
                   <a:schemeClr val="tx1">
                     <a:tint val="75000"/>
@@ -928,9 +933,9 @@
                 </a:solidFill>
               </a:defRPr>
             </a:lvl4pPr>
-            <a:lvl5pPr marL="671901" indent="0">
-              <a:buNone/>
-              <a:defRPr sz="588">
+            <a:lvl5pPr marL="527975" indent="0">
+              <a:buNone/>
+              <a:defRPr sz="462">
                 <a:solidFill>
                   <a:schemeClr val="tx1">
                     <a:tint val="75000"/>
@@ -938,9 +943,9 @@
                 </a:solidFill>
               </a:defRPr>
             </a:lvl5pPr>
-            <a:lvl6pPr marL="839876" indent="0">
-              <a:buNone/>
-              <a:defRPr sz="588">
+            <a:lvl6pPr marL="659968" indent="0">
+              <a:buNone/>
+              <a:defRPr sz="462">
                 <a:solidFill>
                   <a:schemeClr val="tx1">
                     <a:tint val="75000"/>
@@ -948,9 +953,9 @@
                 </a:solidFill>
               </a:defRPr>
             </a:lvl6pPr>
-            <a:lvl7pPr marL="1007852" indent="0">
-              <a:buNone/>
-              <a:defRPr sz="588">
+            <a:lvl7pPr marL="791962" indent="0">
+              <a:buNone/>
+              <a:defRPr sz="462">
                 <a:solidFill>
                   <a:schemeClr val="tx1">
                     <a:tint val="75000"/>
@@ -958,9 +963,9 @@
                 </a:solidFill>
               </a:defRPr>
             </a:lvl7pPr>
-            <a:lvl8pPr marL="1175827" indent="0">
-              <a:buNone/>
-              <a:defRPr sz="588">
+            <a:lvl8pPr marL="923955" indent="0">
+              <a:buNone/>
+              <a:defRPr sz="462">
                 <a:solidFill>
                   <a:schemeClr val="tx1">
                     <a:tint val="75000"/>
@@ -968,9 +973,9 @@
                 </a:solidFill>
               </a:defRPr>
             </a:lvl8pPr>
-            <a:lvl9pPr marL="1343802" indent="0">
-              <a:buNone/>
-              <a:defRPr sz="588">
+            <a:lvl9pPr marL="1055949" indent="0">
+              <a:buNone/>
+              <a:defRPr sz="462">
                 <a:solidFill>
                   <a:schemeClr val="tx1">
                     <a:tint val="75000"/>
@@ -1005,7 +1010,7 @@
           <a:p>
             <a:fld id="{59A742F1-1304-4C54-862D-C54330E4275F}" type="datetimeFigureOut">
               <a:rPr lang="zh-TW" altLang="en-US" smtClean="0"/>
-              <a:t>2026/3/23</a:t>
+              <a:t>2026/4/20</a:t>
             </a:fld>
             <a:endParaRPr lang="zh-TW" altLang="en-US"/>
           </a:p>
@@ -1056,7 +1061,7 @@
     </p:spTree>
     <p:extLst>
       <p:ext uri="{BB962C8B-B14F-4D97-AF65-F5344CB8AC3E}">
-        <p14:creationId xmlns:p14="http://schemas.microsoft.com/office/powerpoint/2010/main" val="457431863"/>
+        <p14:creationId xmlns:p14="http://schemas.microsoft.com/office/powerpoint/2010/main" val="1525163588"/>
       </p:ext>
     </p:extLst>
   </p:cSld>
@@ -1118,8 +1123,8 @@
         </p:nvSpPr>
         <p:spPr>
           <a:xfrm>
-            <a:off x="838200" y="670664"/>
-            <a:ext cx="5181600" cy="1598513"/>
+            <a:off x="742484" y="526980"/>
+            <a:ext cx="4589899" cy="1256046"/>
           </a:xfrm>
         </p:spPr>
         <p:txBody>
@@ -1175,8 +1180,8 @@
         </p:nvSpPr>
         <p:spPr>
           <a:xfrm>
-            <a:off x="6172200" y="670664"/>
-            <a:ext cx="5181600" cy="1598513"/>
+            <a:off x="5467380" y="526980"/>
+            <a:ext cx="4589899" cy="1256046"/>
           </a:xfrm>
         </p:spPr>
         <p:txBody>
@@ -1237,7 +1242,7 @@
           <a:p>
             <a:fld id="{59A742F1-1304-4C54-862D-C54330E4275F}" type="datetimeFigureOut">
               <a:rPr lang="zh-TW" altLang="en-US" smtClean="0"/>
-              <a:t>2026/3/23</a:t>
+              <a:t>2026/4/20</a:t>
             </a:fld>
             <a:endParaRPr lang="zh-TW" altLang="en-US"/>
           </a:p>
@@ -1288,7 +1293,7 @@
     </p:spTree>
     <p:extLst>
       <p:ext uri="{BB962C8B-B14F-4D97-AF65-F5344CB8AC3E}">
-        <p14:creationId xmlns:p14="http://schemas.microsoft.com/office/powerpoint/2010/main" val="3531234253"/>
+        <p14:creationId xmlns:p14="http://schemas.microsoft.com/office/powerpoint/2010/main" val="2917963975"/>
       </p:ext>
     </p:extLst>
   </p:cSld>
@@ -1327,8 +1332,8 @@
         </p:nvSpPr>
         <p:spPr>
           <a:xfrm>
-            <a:off x="839788" y="134133"/>
-            <a:ext cx="10515600" cy="486960"/>
+            <a:off x="743890" y="105396"/>
+            <a:ext cx="9314796" cy="382634"/>
           </a:xfrm>
         </p:spPr>
         <p:txBody>
@@ -1355,8 +1360,8 @@
         </p:nvSpPr>
         <p:spPr>
           <a:xfrm>
-            <a:off x="839789" y="617594"/>
-            <a:ext cx="5157787" cy="302673"/>
+            <a:off x="743891" y="485280"/>
+            <a:ext cx="4568806" cy="237828"/>
           </a:xfrm>
         </p:spPr>
         <p:txBody>
@@ -1364,39 +1369,39 @@
           <a:lstStyle>
             <a:lvl1pPr marL="0" indent="0">
               <a:buNone/>
-              <a:defRPr sz="882" b="1"/>
+              <a:defRPr sz="693" b="1"/>
             </a:lvl1pPr>
-            <a:lvl2pPr marL="167975" indent="0">
-              <a:buNone/>
-              <a:defRPr sz="735" b="1"/>
+            <a:lvl2pPr marL="131994" indent="0">
+              <a:buNone/>
+              <a:defRPr sz="577" b="1"/>
             </a:lvl2pPr>
-            <a:lvl3pPr marL="335951" indent="0">
-              <a:buNone/>
-              <a:defRPr sz="661" b="1"/>
+            <a:lvl3pPr marL="263987" indent="0">
+              <a:buNone/>
+              <a:defRPr sz="520" b="1"/>
             </a:lvl3pPr>
-            <a:lvl4pPr marL="503926" indent="0">
-              <a:buNone/>
-              <a:defRPr sz="588" b="1"/>
+            <a:lvl4pPr marL="395981" indent="0">
+              <a:buNone/>
+              <a:defRPr sz="462" b="1"/>
             </a:lvl4pPr>
-            <a:lvl5pPr marL="671901" indent="0">
-              <a:buNone/>
-              <a:defRPr sz="588" b="1"/>
+            <a:lvl5pPr marL="527975" indent="0">
+              <a:buNone/>
+              <a:defRPr sz="462" b="1"/>
             </a:lvl5pPr>
-            <a:lvl6pPr marL="839876" indent="0">
-              <a:buNone/>
-              <a:defRPr sz="588" b="1"/>
+            <a:lvl6pPr marL="659968" indent="0">
+              <a:buNone/>
+              <a:defRPr sz="462" b="1"/>
             </a:lvl6pPr>
-            <a:lvl7pPr marL="1007852" indent="0">
-              <a:buNone/>
-              <a:defRPr sz="588" b="1"/>
+            <a:lvl7pPr marL="791962" indent="0">
+              <a:buNone/>
+              <a:defRPr sz="462" b="1"/>
             </a:lvl7pPr>
-            <a:lvl8pPr marL="1175827" indent="0">
-              <a:buNone/>
-              <a:defRPr sz="588" b="1"/>
+            <a:lvl8pPr marL="923955" indent="0">
+              <a:buNone/>
+              <a:defRPr sz="462" b="1"/>
             </a:lvl8pPr>
-            <a:lvl9pPr marL="1343802" indent="0">
-              <a:buNone/>
-              <a:defRPr sz="588" b="1"/>
+            <a:lvl9pPr marL="1055949" indent="0">
+              <a:buNone/>
+              <a:defRPr sz="462" b="1"/>
             </a:lvl9pPr>
           </a:lstStyle>
           <a:p>
@@ -1420,8 +1425,8 @@
         </p:nvSpPr>
         <p:spPr>
           <a:xfrm>
-            <a:off x="839789" y="920267"/>
-            <a:ext cx="5157787" cy="1353575"/>
+            <a:off x="743891" y="723109"/>
+            <a:ext cx="4568806" cy="1063584"/>
           </a:xfrm>
         </p:spPr>
         <p:txBody>
@@ -1477,8 +1482,8 @@
         </p:nvSpPr>
         <p:spPr>
           <a:xfrm>
-            <a:off x="6172200" y="617594"/>
-            <a:ext cx="5183188" cy="302673"/>
+            <a:off x="5467380" y="485280"/>
+            <a:ext cx="4591306" cy="237828"/>
           </a:xfrm>
         </p:spPr>
         <p:txBody>
@@ -1486,39 +1491,39 @@
           <a:lstStyle>
             <a:lvl1pPr marL="0" indent="0">
               <a:buNone/>
-              <a:defRPr sz="882" b="1"/>
+              <a:defRPr sz="693" b="1"/>
             </a:lvl1pPr>
-            <a:lvl2pPr marL="167975" indent="0">
-              <a:buNone/>
-              <a:defRPr sz="735" b="1"/>
+            <a:lvl2pPr marL="131994" indent="0">
+              <a:buNone/>
+              <a:defRPr sz="577" b="1"/>
             </a:lvl2pPr>
-            <a:lvl3pPr marL="335951" indent="0">
-              <a:buNone/>
-              <a:defRPr sz="661" b="1"/>
+            <a:lvl3pPr marL="263987" indent="0">
+              <a:buNone/>
+              <a:defRPr sz="520" b="1"/>
             </a:lvl3pPr>
-            <a:lvl4pPr marL="503926" indent="0">
-              <a:buNone/>
-              <a:defRPr sz="588" b="1"/>
+            <a:lvl4pPr marL="395981" indent="0">
+              <a:buNone/>
+              <a:defRPr sz="462" b="1"/>
             </a:lvl4pPr>
-            <a:lvl5pPr marL="671901" indent="0">
-              <a:buNone/>
-              <a:defRPr sz="588" b="1"/>
+            <a:lvl5pPr marL="527975" indent="0">
+              <a:buNone/>
+              <a:defRPr sz="462" b="1"/>
             </a:lvl5pPr>
-            <a:lvl6pPr marL="839876" indent="0">
-              <a:buNone/>
-              <a:defRPr sz="588" b="1"/>
+            <a:lvl6pPr marL="659968" indent="0">
+              <a:buNone/>
+              <a:defRPr sz="462" b="1"/>
             </a:lvl6pPr>
-            <a:lvl7pPr marL="1007852" indent="0">
-              <a:buNone/>
-              <a:defRPr sz="588" b="1"/>
+            <a:lvl7pPr marL="791962" indent="0">
+              <a:buNone/>
+              <a:defRPr sz="462" b="1"/>
             </a:lvl7pPr>
-            <a:lvl8pPr marL="1175827" indent="0">
-              <a:buNone/>
-              <a:defRPr sz="588" b="1"/>
+            <a:lvl8pPr marL="923955" indent="0">
+              <a:buNone/>
+              <a:defRPr sz="462" b="1"/>
             </a:lvl8pPr>
-            <a:lvl9pPr marL="1343802" indent="0">
-              <a:buNone/>
-              <a:defRPr sz="588" b="1"/>
+            <a:lvl9pPr marL="1055949" indent="0">
+              <a:buNone/>
+              <a:defRPr sz="462" b="1"/>
             </a:lvl9pPr>
           </a:lstStyle>
           <a:p>
@@ -1542,8 +1547,8 @@
         </p:nvSpPr>
         <p:spPr>
           <a:xfrm>
-            <a:off x="6172200" y="920267"/>
-            <a:ext cx="5183188" cy="1353575"/>
+            <a:off x="5467380" y="723109"/>
+            <a:ext cx="4591306" cy="1063584"/>
           </a:xfrm>
         </p:spPr>
         <p:txBody>
@@ -1604,7 +1609,7 @@
           <a:p>
             <a:fld id="{59A742F1-1304-4C54-862D-C54330E4275F}" type="datetimeFigureOut">
               <a:rPr lang="zh-TW" altLang="en-US" smtClean="0"/>
-              <a:t>2026/3/23</a:t>
+              <a:t>2026/4/20</a:t>
             </a:fld>
             <a:endParaRPr lang="zh-TW" altLang="en-US"/>
           </a:p>
@@ -1655,7 +1660,7 @@
     </p:spTree>
     <p:extLst>
       <p:ext uri="{BB962C8B-B14F-4D97-AF65-F5344CB8AC3E}">
-        <p14:creationId xmlns:p14="http://schemas.microsoft.com/office/powerpoint/2010/main" val="599836055"/>
+        <p14:creationId xmlns:p14="http://schemas.microsoft.com/office/powerpoint/2010/main" val="1806411827"/>
       </p:ext>
     </p:extLst>
   </p:cSld>
@@ -1722,7 +1727,7 @@
           <a:p>
             <a:fld id="{59A742F1-1304-4C54-862D-C54330E4275F}" type="datetimeFigureOut">
               <a:rPr lang="zh-TW" altLang="en-US" smtClean="0"/>
-              <a:t>2026/3/23</a:t>
+              <a:t>2026/4/20</a:t>
             </a:fld>
             <a:endParaRPr lang="zh-TW" altLang="en-US"/>
           </a:p>
@@ -1773,7 +1778,7 @@
     </p:spTree>
     <p:extLst>
       <p:ext uri="{BB962C8B-B14F-4D97-AF65-F5344CB8AC3E}">
-        <p14:creationId xmlns:p14="http://schemas.microsoft.com/office/powerpoint/2010/main" val="2433335618"/>
+        <p14:creationId xmlns:p14="http://schemas.microsoft.com/office/powerpoint/2010/main" val="1998138172"/>
       </p:ext>
     </p:extLst>
   </p:cSld>
@@ -1817,7 +1822,7 @@
           <a:p>
             <a:fld id="{59A742F1-1304-4C54-862D-C54330E4275F}" type="datetimeFigureOut">
               <a:rPr lang="zh-TW" altLang="en-US" smtClean="0"/>
-              <a:t>2026/3/23</a:t>
+              <a:t>2026/4/20</a:t>
             </a:fld>
             <a:endParaRPr lang="zh-TW" altLang="en-US"/>
           </a:p>
@@ -1868,7 +1873,7 @@
     </p:spTree>
     <p:extLst>
       <p:ext uri="{BB962C8B-B14F-4D97-AF65-F5344CB8AC3E}">
-        <p14:creationId xmlns:p14="http://schemas.microsoft.com/office/powerpoint/2010/main" val="3876213402"/>
+        <p14:creationId xmlns:p14="http://schemas.microsoft.com/office/powerpoint/2010/main" val="266676235"/>
       </p:ext>
     </p:extLst>
   </p:cSld>
@@ -1907,15 +1912,15 @@
         </p:nvSpPr>
         <p:spPr>
           <a:xfrm>
-            <a:off x="839789" y="167958"/>
-            <a:ext cx="3932237" cy="587851"/>
+            <a:off x="743891" y="131974"/>
+            <a:ext cx="3483204" cy="461910"/>
           </a:xfrm>
         </p:spPr>
         <p:txBody>
           <a:bodyPr anchor="b"/>
           <a:lstStyle>
             <a:lvl1pPr>
-              <a:defRPr sz="1176"/>
+              <a:defRPr sz="924"/>
             </a:lvl1pPr>
           </a:lstStyle>
           <a:p>
@@ -1939,39 +1944,39 @@
         </p:nvSpPr>
         <p:spPr>
           <a:xfrm>
-            <a:off x="5183188" y="362742"/>
-            <a:ext cx="6172200" cy="1790381"/>
+            <a:off x="4591306" y="285028"/>
+            <a:ext cx="5467380" cy="1406808"/>
           </a:xfrm>
         </p:spPr>
         <p:txBody>
           <a:bodyPr/>
           <a:lstStyle>
             <a:lvl1pPr>
-              <a:defRPr sz="1176"/>
+              <a:defRPr sz="924"/>
             </a:lvl1pPr>
             <a:lvl2pPr>
-              <a:defRPr sz="1029"/>
+              <a:defRPr sz="808"/>
             </a:lvl2pPr>
             <a:lvl3pPr>
-              <a:defRPr sz="882"/>
+              <a:defRPr sz="693"/>
             </a:lvl3pPr>
             <a:lvl4pPr>
-              <a:defRPr sz="735"/>
+              <a:defRPr sz="577"/>
             </a:lvl4pPr>
             <a:lvl5pPr>
-              <a:defRPr sz="735"/>
+              <a:defRPr sz="577"/>
             </a:lvl5pPr>
             <a:lvl6pPr>
-              <a:defRPr sz="735"/>
+              <a:defRPr sz="577"/>
             </a:lvl6pPr>
             <a:lvl7pPr>
-              <a:defRPr sz="735"/>
+              <a:defRPr sz="577"/>
             </a:lvl7pPr>
             <a:lvl8pPr>
-              <a:defRPr sz="735"/>
+              <a:defRPr sz="577"/>
             </a:lvl8pPr>
             <a:lvl9pPr>
-              <a:defRPr sz="735"/>
+              <a:defRPr sz="577"/>
             </a:lvl9pPr>
           </a:lstStyle>
           <a:p>
@@ -2024,8 +2029,8 @@
         </p:nvSpPr>
         <p:spPr>
           <a:xfrm>
-            <a:off x="839789" y="755809"/>
-            <a:ext cx="3932237" cy="1400229"/>
+            <a:off x="743891" y="593884"/>
+            <a:ext cx="3483204" cy="1100243"/>
           </a:xfrm>
         </p:spPr>
         <p:txBody>
@@ -2033,39 +2038,39 @@
           <a:lstStyle>
             <a:lvl1pPr marL="0" indent="0">
               <a:buNone/>
-              <a:defRPr sz="588"/>
+              <a:defRPr sz="462"/>
             </a:lvl1pPr>
-            <a:lvl2pPr marL="167975" indent="0">
-              <a:buNone/>
-              <a:defRPr sz="514"/>
+            <a:lvl2pPr marL="131994" indent="0">
+              <a:buNone/>
+              <a:defRPr sz="404"/>
             </a:lvl2pPr>
-            <a:lvl3pPr marL="335951" indent="0">
-              <a:buNone/>
-              <a:defRPr sz="441"/>
+            <a:lvl3pPr marL="263987" indent="0">
+              <a:buNone/>
+              <a:defRPr sz="346"/>
             </a:lvl3pPr>
-            <a:lvl4pPr marL="503926" indent="0">
-              <a:buNone/>
-              <a:defRPr sz="367"/>
+            <a:lvl4pPr marL="395981" indent="0">
+              <a:buNone/>
+              <a:defRPr sz="289"/>
             </a:lvl4pPr>
-            <a:lvl5pPr marL="671901" indent="0">
-              <a:buNone/>
-              <a:defRPr sz="367"/>
+            <a:lvl5pPr marL="527975" indent="0">
+              <a:buNone/>
+              <a:defRPr sz="289"/>
             </a:lvl5pPr>
-            <a:lvl6pPr marL="839876" indent="0">
-              <a:buNone/>
-              <a:defRPr sz="367"/>
+            <a:lvl6pPr marL="659968" indent="0">
+              <a:buNone/>
+              <a:defRPr sz="289"/>
             </a:lvl6pPr>
-            <a:lvl7pPr marL="1007852" indent="0">
-              <a:buNone/>
-              <a:defRPr sz="367"/>
+            <a:lvl7pPr marL="791962" indent="0">
+              <a:buNone/>
+              <a:defRPr sz="289"/>
             </a:lvl7pPr>
-            <a:lvl8pPr marL="1175827" indent="0">
-              <a:buNone/>
-              <a:defRPr sz="367"/>
+            <a:lvl8pPr marL="923955" indent="0">
+              <a:buNone/>
+              <a:defRPr sz="289"/>
             </a:lvl8pPr>
-            <a:lvl9pPr marL="1343802" indent="0">
-              <a:buNone/>
-              <a:defRPr sz="367"/>
+            <a:lvl9pPr marL="1055949" indent="0">
+              <a:buNone/>
+              <a:defRPr sz="289"/>
             </a:lvl9pPr>
           </a:lstStyle>
           <a:p>
@@ -2094,7 +2099,7 @@
           <a:p>
             <a:fld id="{59A742F1-1304-4C54-862D-C54330E4275F}" type="datetimeFigureOut">
               <a:rPr lang="zh-TW" altLang="en-US" smtClean="0"/>
-              <a:t>2026/3/23</a:t>
+              <a:t>2026/4/20</a:t>
             </a:fld>
             <a:endParaRPr lang="zh-TW" altLang="en-US"/>
           </a:p>
@@ -2145,7 +2150,7 @@
     </p:spTree>
     <p:extLst>
       <p:ext uri="{BB962C8B-B14F-4D97-AF65-F5344CB8AC3E}">
-        <p14:creationId xmlns:p14="http://schemas.microsoft.com/office/powerpoint/2010/main" val="1155524791"/>
+        <p14:creationId xmlns:p14="http://schemas.microsoft.com/office/powerpoint/2010/main" val="1299835501"/>
       </p:ext>
     </p:extLst>
   </p:cSld>
@@ -2184,15 +2189,15 @@
         </p:nvSpPr>
         <p:spPr>
           <a:xfrm>
-            <a:off x="839789" y="167958"/>
-            <a:ext cx="3932237" cy="587851"/>
+            <a:off x="743891" y="131974"/>
+            <a:ext cx="3483204" cy="461910"/>
           </a:xfrm>
         </p:spPr>
         <p:txBody>
           <a:bodyPr anchor="b"/>
           <a:lstStyle>
             <a:lvl1pPr>
-              <a:defRPr sz="1176"/>
+              <a:defRPr sz="924"/>
             </a:lvl1pPr>
           </a:lstStyle>
           <a:p>
@@ -2216,8 +2221,8 @@
         </p:nvSpPr>
         <p:spPr>
           <a:xfrm>
-            <a:off x="5183188" y="362742"/>
-            <a:ext cx="6172200" cy="1790381"/>
+            <a:off x="4591306" y="285028"/>
+            <a:ext cx="5467380" cy="1406808"/>
           </a:xfrm>
         </p:spPr>
         <p:txBody>
@@ -2225,39 +2230,39 @@
           <a:lstStyle>
             <a:lvl1pPr marL="0" indent="0">
               <a:buNone/>
-              <a:defRPr sz="1176"/>
+              <a:defRPr sz="924"/>
             </a:lvl1pPr>
-            <a:lvl2pPr marL="167975" indent="0">
-              <a:buNone/>
-              <a:defRPr sz="1029"/>
+            <a:lvl2pPr marL="131994" indent="0">
+              <a:buNone/>
+              <a:defRPr sz="808"/>
             </a:lvl2pPr>
-            <a:lvl3pPr marL="335951" indent="0">
-              <a:buNone/>
-              <a:defRPr sz="882"/>
+            <a:lvl3pPr marL="263987" indent="0">
+              <a:buNone/>
+              <a:defRPr sz="693"/>
             </a:lvl3pPr>
-            <a:lvl4pPr marL="503926" indent="0">
-              <a:buNone/>
-              <a:defRPr sz="735"/>
+            <a:lvl4pPr marL="395981" indent="0">
+              <a:buNone/>
+              <a:defRPr sz="577"/>
             </a:lvl4pPr>
-            <a:lvl5pPr marL="671901" indent="0">
-              <a:buNone/>
-              <a:defRPr sz="735"/>
+            <a:lvl5pPr marL="527975" indent="0">
+              <a:buNone/>
+              <a:defRPr sz="577"/>
             </a:lvl5pPr>
-            <a:lvl6pPr marL="839876" indent="0">
-              <a:buNone/>
-              <a:defRPr sz="735"/>
+            <a:lvl6pPr marL="659968" indent="0">
+              <a:buNone/>
+              <a:defRPr sz="577"/>
             </a:lvl6pPr>
-            <a:lvl7pPr marL="1007852" indent="0">
-              <a:buNone/>
-              <a:defRPr sz="735"/>
+            <a:lvl7pPr marL="791962" indent="0">
+              <a:buNone/>
+              <a:defRPr sz="577"/>
             </a:lvl7pPr>
-            <a:lvl8pPr marL="1175827" indent="0">
-              <a:buNone/>
-              <a:defRPr sz="735"/>
+            <a:lvl8pPr marL="923955" indent="0">
+              <a:buNone/>
+              <a:defRPr sz="577"/>
             </a:lvl8pPr>
-            <a:lvl9pPr marL="1343802" indent="0">
-              <a:buNone/>
-              <a:defRPr sz="735"/>
+            <a:lvl9pPr marL="1055949" indent="0">
+              <a:buNone/>
+              <a:defRPr sz="577"/>
             </a:lvl9pPr>
           </a:lstStyle>
           <a:p>
@@ -2281,8 +2286,8 @@
         </p:nvSpPr>
         <p:spPr>
           <a:xfrm>
-            <a:off x="839789" y="755809"/>
-            <a:ext cx="3932237" cy="1400229"/>
+            <a:off x="743891" y="593884"/>
+            <a:ext cx="3483204" cy="1100243"/>
           </a:xfrm>
         </p:spPr>
         <p:txBody>
@@ -2290,39 +2295,39 @@
           <a:lstStyle>
             <a:lvl1pPr marL="0" indent="0">
               <a:buNone/>
-              <a:defRPr sz="588"/>
+              <a:defRPr sz="462"/>
             </a:lvl1pPr>
-            <a:lvl2pPr marL="167975" indent="0">
-              <a:buNone/>
-              <a:defRPr sz="514"/>
+            <a:lvl2pPr marL="131994" indent="0">
+              <a:buNone/>
+              <a:defRPr sz="404"/>
             </a:lvl2pPr>
-            <a:lvl3pPr marL="335951" indent="0">
-              <a:buNone/>
-              <a:defRPr sz="441"/>
+            <a:lvl3pPr marL="263987" indent="0">
+              <a:buNone/>
+              <a:defRPr sz="346"/>
             </a:lvl3pPr>
-            <a:lvl4pPr marL="503926" indent="0">
-              <a:buNone/>
-              <a:defRPr sz="367"/>
+            <a:lvl4pPr marL="395981" indent="0">
+              <a:buNone/>
+              <a:defRPr sz="289"/>
             </a:lvl4pPr>
-            <a:lvl5pPr marL="671901" indent="0">
-              <a:buNone/>
-              <a:defRPr sz="367"/>
+            <a:lvl5pPr marL="527975" indent="0">
+              <a:buNone/>
+              <a:defRPr sz="289"/>
             </a:lvl5pPr>
-            <a:lvl6pPr marL="839876" indent="0">
-              <a:buNone/>
-              <a:defRPr sz="367"/>
+            <a:lvl6pPr marL="659968" indent="0">
+              <a:buNone/>
+              <a:defRPr sz="289"/>
             </a:lvl6pPr>
-            <a:lvl7pPr marL="1007852" indent="0">
-              <a:buNone/>
-              <a:defRPr sz="367"/>
+            <a:lvl7pPr marL="791962" indent="0">
+              <a:buNone/>
+              <a:defRPr sz="289"/>
             </a:lvl7pPr>
-            <a:lvl8pPr marL="1175827" indent="0">
-              <a:buNone/>
-              <a:defRPr sz="367"/>
+            <a:lvl8pPr marL="923955" indent="0">
+              <a:buNone/>
+              <a:defRPr sz="289"/>
             </a:lvl8pPr>
-            <a:lvl9pPr marL="1343802" indent="0">
-              <a:buNone/>
-              <a:defRPr sz="367"/>
+            <a:lvl9pPr marL="1055949" indent="0">
+              <a:buNone/>
+              <a:defRPr sz="289"/>
             </a:lvl9pPr>
           </a:lstStyle>
           <a:p>
@@ -2351,7 +2356,7 @@
           <a:p>
             <a:fld id="{59A742F1-1304-4C54-862D-C54330E4275F}" type="datetimeFigureOut">
               <a:rPr lang="zh-TW" altLang="en-US" smtClean="0"/>
-              <a:t>2026/3/23</a:t>
+              <a:t>2026/4/20</a:t>
             </a:fld>
             <a:endParaRPr lang="zh-TW" altLang="en-US"/>
           </a:p>
@@ -2402,7 +2407,7 @@
     </p:spTree>
     <p:extLst>
       <p:ext uri="{BB962C8B-B14F-4D97-AF65-F5344CB8AC3E}">
-        <p14:creationId xmlns:p14="http://schemas.microsoft.com/office/powerpoint/2010/main" val="503473993"/>
+        <p14:creationId xmlns:p14="http://schemas.microsoft.com/office/powerpoint/2010/main" val="4084768149"/>
       </p:ext>
     </p:extLst>
   </p:cSld>
@@ -2446,8 +2451,8 @@
         </p:nvSpPr>
         <p:spPr>
           <a:xfrm>
-            <a:off x="838200" y="134133"/>
-            <a:ext cx="10515600" cy="486960"/>
+            <a:off x="742484" y="105396"/>
+            <a:ext cx="9314796" cy="382634"/>
           </a:xfrm>
           <a:prstGeom prst="rect">
             <a:avLst/>
@@ -2479,8 +2484,8 @@
         </p:nvSpPr>
         <p:spPr>
           <a:xfrm>
-            <a:off x="838200" y="670664"/>
-            <a:ext cx="10515600" cy="1598513"/>
+            <a:off x="742484" y="526980"/>
+            <a:ext cx="9314796" cy="1256046"/>
           </a:xfrm>
           <a:prstGeom prst="rect">
             <a:avLst/>
@@ -2541,8 +2546,8 @@
         </p:nvSpPr>
         <p:spPr>
           <a:xfrm>
-            <a:off x="838200" y="2335076"/>
-            <a:ext cx="2743200" cy="134133"/>
+            <a:off x="742484" y="1834808"/>
+            <a:ext cx="2429947" cy="105396"/>
           </a:xfrm>
           <a:prstGeom prst="rect">
             <a:avLst/>
@@ -2552,7 +2557,7 @@
           <a:bodyPr vert="horz" lIns="91440" tIns="45720" rIns="91440" bIns="45720" rtlCol="0" anchor="ctr"/>
           <a:lstStyle>
             <a:lvl1pPr algn="l">
-              <a:defRPr sz="441">
+              <a:defRPr sz="346">
                 <a:solidFill>
                   <a:schemeClr val="tx1">
                     <a:tint val="75000"/>
@@ -2564,7 +2569,7 @@
           <a:p>
             <a:fld id="{59A742F1-1304-4C54-862D-C54330E4275F}" type="datetimeFigureOut">
               <a:rPr lang="zh-TW" altLang="en-US" smtClean="0"/>
-              <a:t>2026/3/23</a:t>
+              <a:t>2026/4/20</a:t>
             </a:fld>
             <a:endParaRPr lang="zh-TW" altLang="en-US"/>
           </a:p>
@@ -2582,8 +2587,8 @@
         </p:nvSpPr>
         <p:spPr>
           <a:xfrm>
-            <a:off x="4038600" y="2335076"/>
-            <a:ext cx="4114800" cy="134133"/>
+            <a:off x="3577422" y="1834808"/>
+            <a:ext cx="3644920" cy="105396"/>
           </a:xfrm>
           <a:prstGeom prst="rect">
             <a:avLst/>
@@ -2593,7 +2598,7 @@
           <a:bodyPr vert="horz" lIns="91440" tIns="45720" rIns="91440" bIns="45720" rtlCol="0" anchor="ctr"/>
           <a:lstStyle>
             <a:lvl1pPr algn="ctr">
-              <a:defRPr sz="441">
+              <a:defRPr sz="346">
                 <a:solidFill>
                   <a:schemeClr val="tx1">
                     <a:tint val="75000"/>
@@ -2619,8 +2624,8 @@
         </p:nvSpPr>
         <p:spPr>
           <a:xfrm>
-            <a:off x="8610600" y="2335076"/>
-            <a:ext cx="2743200" cy="134133"/>
+            <a:off x="7627332" y="1834808"/>
+            <a:ext cx="2429947" cy="105396"/>
           </a:xfrm>
           <a:prstGeom prst="rect">
             <a:avLst/>
@@ -2630,7 +2635,7 @@
           <a:bodyPr vert="horz" lIns="91440" tIns="45720" rIns="91440" bIns="45720" rtlCol="0" anchor="ctr"/>
           <a:lstStyle>
             <a:lvl1pPr algn="r">
-              <a:defRPr sz="441">
+              <a:defRPr sz="346">
                 <a:solidFill>
                   <a:schemeClr val="tx1">
                     <a:tint val="75000"/>
@@ -2651,27 +2656,27 @@
     </p:spTree>
     <p:extLst>
       <p:ext uri="{BB962C8B-B14F-4D97-AF65-F5344CB8AC3E}">
-        <p14:creationId xmlns:p14="http://schemas.microsoft.com/office/powerpoint/2010/main" val="3840126706"/>
+        <p14:creationId xmlns:p14="http://schemas.microsoft.com/office/powerpoint/2010/main" val="3891882377"/>
       </p:ext>
     </p:extLst>
   </p:cSld>
   <p:clrMap bg1="lt1" tx1="dk1" bg2="lt2" tx2="dk2" accent1="accent1" accent2="accent2" accent3="accent3" accent4="accent4" accent5="accent5" accent6="accent6" hlink="hlink" folHlink="folHlink"/>
   <p:sldLayoutIdLst>
-    <p:sldLayoutId id="2147483673" r:id="rId1"/>
-    <p:sldLayoutId id="2147483674" r:id="rId2"/>
-    <p:sldLayoutId id="2147483675" r:id="rId3"/>
-    <p:sldLayoutId id="2147483676" r:id="rId4"/>
-    <p:sldLayoutId id="2147483677" r:id="rId5"/>
-    <p:sldLayoutId id="2147483678" r:id="rId6"/>
-    <p:sldLayoutId id="2147483679" r:id="rId7"/>
-    <p:sldLayoutId id="2147483680" r:id="rId8"/>
-    <p:sldLayoutId id="2147483681" r:id="rId9"/>
-    <p:sldLayoutId id="2147483682" r:id="rId10"/>
-    <p:sldLayoutId id="2147483683" r:id="rId11"/>
+    <p:sldLayoutId id="2147483709" r:id="rId1"/>
+    <p:sldLayoutId id="2147483710" r:id="rId2"/>
+    <p:sldLayoutId id="2147483711" r:id="rId3"/>
+    <p:sldLayoutId id="2147483712" r:id="rId4"/>
+    <p:sldLayoutId id="2147483713" r:id="rId5"/>
+    <p:sldLayoutId id="2147483714" r:id="rId6"/>
+    <p:sldLayoutId id="2147483715" r:id="rId7"/>
+    <p:sldLayoutId id="2147483716" r:id="rId8"/>
+    <p:sldLayoutId id="2147483717" r:id="rId9"/>
+    <p:sldLayoutId id="2147483718" r:id="rId10"/>
+    <p:sldLayoutId id="2147483719" r:id="rId11"/>
   </p:sldLayoutIdLst>
   <p:txStyles>
     <p:titleStyle>
-      <a:lvl1pPr algn="l" defTabSz="335951" rtl="0" eaLnBrk="1" latinLnBrk="0" hangingPunct="1">
+      <a:lvl1pPr algn="l" defTabSz="263987" rtl="0" eaLnBrk="1" latinLnBrk="0" hangingPunct="1">
         <a:lnSpc>
           <a:spcPct val="90000"/>
         </a:lnSpc>
@@ -2679,7 +2684,7 @@
           <a:spcPct val="0"/>
         </a:spcBef>
         <a:buNone/>
-        <a:defRPr sz="1617" kern="1200">
+        <a:defRPr sz="1270" kern="1200">
           <a:solidFill>
             <a:schemeClr val="tx1"/>
           </a:solidFill>
@@ -2690,16 +2695,16 @@
       </a:lvl1pPr>
     </p:titleStyle>
     <p:bodyStyle>
-      <a:lvl1pPr marL="83988" indent="-83988" algn="l" defTabSz="335951" rtl="0" eaLnBrk="1" latinLnBrk="0" hangingPunct="1">
+      <a:lvl1pPr marL="65997" indent="-65997" algn="l" defTabSz="263987" rtl="0" eaLnBrk="1" latinLnBrk="0" hangingPunct="1">
         <a:lnSpc>
           <a:spcPct val="90000"/>
         </a:lnSpc>
         <a:spcBef>
-          <a:spcPts val="367"/>
+          <a:spcPts val="289"/>
         </a:spcBef>
         <a:buFont typeface="Arial" panose="020B0604020202020204" pitchFamily="34" charset="0"/>
         <a:buChar char="•"/>
-        <a:defRPr sz="1029" kern="1200">
+        <a:defRPr sz="808" kern="1200">
           <a:solidFill>
             <a:schemeClr val="tx1"/>
           </a:solidFill>
@@ -2708,16 +2713,16 @@
           <a:cs typeface="+mn-cs"/>
         </a:defRPr>
       </a:lvl1pPr>
-      <a:lvl2pPr marL="251963" indent="-83988" algn="l" defTabSz="335951" rtl="0" eaLnBrk="1" latinLnBrk="0" hangingPunct="1">
+      <a:lvl2pPr marL="197990" indent="-65997" algn="l" defTabSz="263987" rtl="0" eaLnBrk="1" latinLnBrk="0" hangingPunct="1">
         <a:lnSpc>
           <a:spcPct val="90000"/>
         </a:lnSpc>
         <a:spcBef>
-          <a:spcPts val="184"/>
+          <a:spcPts val="144"/>
         </a:spcBef>
         <a:buFont typeface="Arial" panose="020B0604020202020204" pitchFamily="34" charset="0"/>
         <a:buChar char="•"/>
-        <a:defRPr sz="882" kern="1200">
+        <a:defRPr sz="693" kern="1200">
           <a:solidFill>
             <a:schemeClr val="tx1"/>
           </a:solidFill>
@@ -2726,16 +2731,16 @@
           <a:cs typeface="+mn-cs"/>
         </a:defRPr>
       </a:lvl2pPr>
-      <a:lvl3pPr marL="419938" indent="-83988" algn="l" defTabSz="335951" rtl="0" eaLnBrk="1" latinLnBrk="0" hangingPunct="1">
+      <a:lvl3pPr marL="329984" indent="-65997" algn="l" defTabSz="263987" rtl="0" eaLnBrk="1" latinLnBrk="0" hangingPunct="1">
         <a:lnSpc>
           <a:spcPct val="90000"/>
         </a:lnSpc>
         <a:spcBef>
-          <a:spcPts val="184"/>
+          <a:spcPts val="144"/>
         </a:spcBef>
         <a:buFont typeface="Arial" panose="020B0604020202020204" pitchFamily="34" charset="0"/>
         <a:buChar char="•"/>
-        <a:defRPr sz="735" kern="1200">
+        <a:defRPr sz="577" kern="1200">
           <a:solidFill>
             <a:schemeClr val="tx1"/>
           </a:solidFill>
@@ -2744,16 +2749,16 @@
           <a:cs typeface="+mn-cs"/>
         </a:defRPr>
       </a:lvl3pPr>
-      <a:lvl4pPr marL="587913" indent="-83988" algn="l" defTabSz="335951" rtl="0" eaLnBrk="1" latinLnBrk="0" hangingPunct="1">
+      <a:lvl4pPr marL="461978" indent="-65997" algn="l" defTabSz="263987" rtl="0" eaLnBrk="1" latinLnBrk="0" hangingPunct="1">
         <a:lnSpc>
           <a:spcPct val="90000"/>
         </a:lnSpc>
         <a:spcBef>
-          <a:spcPts val="184"/>
+          <a:spcPts val="144"/>
         </a:spcBef>
         <a:buFont typeface="Arial" panose="020B0604020202020204" pitchFamily="34" charset="0"/>
         <a:buChar char="•"/>
-        <a:defRPr sz="661" kern="1200">
+        <a:defRPr sz="520" kern="1200">
           <a:solidFill>
             <a:schemeClr val="tx1"/>
           </a:solidFill>
@@ -2762,16 +2767,16 @@
           <a:cs typeface="+mn-cs"/>
         </a:defRPr>
       </a:lvl4pPr>
-      <a:lvl5pPr marL="755889" indent="-83988" algn="l" defTabSz="335951" rtl="0" eaLnBrk="1" latinLnBrk="0" hangingPunct="1">
+      <a:lvl5pPr marL="593971" indent="-65997" algn="l" defTabSz="263987" rtl="0" eaLnBrk="1" latinLnBrk="0" hangingPunct="1">
         <a:lnSpc>
           <a:spcPct val="90000"/>
         </a:lnSpc>
         <a:spcBef>
-          <a:spcPts val="184"/>
+          <a:spcPts val="144"/>
         </a:spcBef>
         <a:buFont typeface="Arial" panose="020B0604020202020204" pitchFamily="34" charset="0"/>
         <a:buChar char="•"/>
-        <a:defRPr sz="661" kern="1200">
+        <a:defRPr sz="520" kern="1200">
           <a:solidFill>
             <a:schemeClr val="tx1"/>
           </a:solidFill>
@@ -2780,16 +2785,16 @@
           <a:cs typeface="+mn-cs"/>
         </a:defRPr>
       </a:lvl5pPr>
-      <a:lvl6pPr marL="923864" indent="-83988" algn="l" defTabSz="335951" rtl="0" eaLnBrk="1" latinLnBrk="0" hangingPunct="1">
+      <a:lvl6pPr marL="725965" indent="-65997" algn="l" defTabSz="263987" rtl="0" eaLnBrk="1" latinLnBrk="0" hangingPunct="1">
         <a:lnSpc>
           <a:spcPct val="90000"/>
         </a:lnSpc>
         <a:spcBef>
-          <a:spcPts val="184"/>
+          <a:spcPts val="144"/>
         </a:spcBef>
         <a:buFont typeface="Arial" panose="020B0604020202020204" pitchFamily="34" charset="0"/>
         <a:buChar char="•"/>
-        <a:defRPr sz="661" kern="1200">
+        <a:defRPr sz="520" kern="1200">
           <a:solidFill>
             <a:schemeClr val="tx1"/>
           </a:solidFill>
@@ -2798,16 +2803,16 @@
           <a:cs typeface="+mn-cs"/>
         </a:defRPr>
       </a:lvl6pPr>
-      <a:lvl7pPr marL="1091839" indent="-83988" algn="l" defTabSz="335951" rtl="0" eaLnBrk="1" latinLnBrk="0" hangingPunct="1">
+      <a:lvl7pPr marL="857959" indent="-65997" algn="l" defTabSz="263987" rtl="0" eaLnBrk="1" latinLnBrk="0" hangingPunct="1">
         <a:lnSpc>
           <a:spcPct val="90000"/>
         </a:lnSpc>
         <a:spcBef>
-          <a:spcPts val="184"/>
+          <a:spcPts val="144"/>
         </a:spcBef>
         <a:buFont typeface="Arial" panose="020B0604020202020204" pitchFamily="34" charset="0"/>
         <a:buChar char="•"/>
-        <a:defRPr sz="661" kern="1200">
+        <a:defRPr sz="520" kern="1200">
           <a:solidFill>
             <a:schemeClr val="tx1"/>
           </a:solidFill>
@@ -2816,16 +2821,16 @@
           <a:cs typeface="+mn-cs"/>
         </a:defRPr>
       </a:lvl7pPr>
-      <a:lvl8pPr marL="1259815" indent="-83988" algn="l" defTabSz="335951" rtl="0" eaLnBrk="1" latinLnBrk="0" hangingPunct="1">
+      <a:lvl8pPr marL="989952" indent="-65997" algn="l" defTabSz="263987" rtl="0" eaLnBrk="1" latinLnBrk="0" hangingPunct="1">
         <a:lnSpc>
           <a:spcPct val="90000"/>
         </a:lnSpc>
         <a:spcBef>
-          <a:spcPts val="184"/>
+          <a:spcPts val="144"/>
         </a:spcBef>
         <a:buFont typeface="Arial" panose="020B0604020202020204" pitchFamily="34" charset="0"/>
         <a:buChar char="•"/>
-        <a:defRPr sz="661" kern="1200">
+        <a:defRPr sz="520" kern="1200">
           <a:solidFill>
             <a:schemeClr val="tx1"/>
           </a:solidFill>
@@ -2834,16 +2839,16 @@
           <a:cs typeface="+mn-cs"/>
         </a:defRPr>
       </a:lvl8pPr>
-      <a:lvl9pPr marL="1427790" indent="-83988" algn="l" defTabSz="335951" rtl="0" eaLnBrk="1" latinLnBrk="0" hangingPunct="1">
+      <a:lvl9pPr marL="1121946" indent="-65997" algn="l" defTabSz="263987" rtl="0" eaLnBrk="1" latinLnBrk="0" hangingPunct="1">
         <a:lnSpc>
           <a:spcPct val="90000"/>
         </a:lnSpc>
         <a:spcBef>
-          <a:spcPts val="184"/>
+          <a:spcPts val="144"/>
         </a:spcBef>
         <a:buFont typeface="Arial" panose="020B0604020202020204" pitchFamily="34" charset="0"/>
         <a:buChar char="•"/>
-        <a:defRPr sz="661" kern="1200">
+        <a:defRPr sz="520" kern="1200">
           <a:solidFill>
             <a:schemeClr val="tx1"/>
           </a:solidFill>
@@ -2857,8 +2862,8 @@
       <a:defPPr>
         <a:defRPr lang="en-US"/>
       </a:defPPr>
-      <a:lvl1pPr marL="0" algn="l" defTabSz="335951" rtl="0" eaLnBrk="1" latinLnBrk="0" hangingPunct="1">
-        <a:defRPr sz="661" kern="1200">
+      <a:lvl1pPr marL="0" algn="l" defTabSz="263987" rtl="0" eaLnBrk="1" latinLnBrk="0" hangingPunct="1">
+        <a:defRPr sz="520" kern="1200">
           <a:solidFill>
             <a:schemeClr val="tx1"/>
           </a:solidFill>
@@ -2867,8 +2872,8 @@
           <a:cs typeface="+mn-cs"/>
         </a:defRPr>
       </a:lvl1pPr>
-      <a:lvl2pPr marL="167975" algn="l" defTabSz="335951" rtl="0" eaLnBrk="1" latinLnBrk="0" hangingPunct="1">
-        <a:defRPr sz="661" kern="1200">
+      <a:lvl2pPr marL="131994" algn="l" defTabSz="263987" rtl="0" eaLnBrk="1" latinLnBrk="0" hangingPunct="1">
+        <a:defRPr sz="520" kern="1200">
           <a:solidFill>
             <a:schemeClr val="tx1"/>
           </a:solidFill>
@@ -2877,8 +2882,8 @@
           <a:cs typeface="+mn-cs"/>
         </a:defRPr>
       </a:lvl2pPr>
-      <a:lvl3pPr marL="335951" algn="l" defTabSz="335951" rtl="0" eaLnBrk="1" latinLnBrk="0" hangingPunct="1">
-        <a:defRPr sz="661" kern="1200">
+      <a:lvl3pPr marL="263987" algn="l" defTabSz="263987" rtl="0" eaLnBrk="1" latinLnBrk="0" hangingPunct="1">
+        <a:defRPr sz="520" kern="1200">
           <a:solidFill>
             <a:schemeClr val="tx1"/>
           </a:solidFill>
@@ -2887,8 +2892,8 @@
           <a:cs typeface="+mn-cs"/>
         </a:defRPr>
       </a:lvl3pPr>
-      <a:lvl4pPr marL="503926" algn="l" defTabSz="335951" rtl="0" eaLnBrk="1" latinLnBrk="0" hangingPunct="1">
-        <a:defRPr sz="661" kern="1200">
+      <a:lvl4pPr marL="395981" algn="l" defTabSz="263987" rtl="0" eaLnBrk="1" latinLnBrk="0" hangingPunct="1">
+        <a:defRPr sz="520" kern="1200">
           <a:solidFill>
             <a:schemeClr val="tx1"/>
           </a:solidFill>
@@ -2897,8 +2902,8 @@
           <a:cs typeface="+mn-cs"/>
         </a:defRPr>
       </a:lvl4pPr>
-      <a:lvl5pPr marL="671901" algn="l" defTabSz="335951" rtl="0" eaLnBrk="1" latinLnBrk="0" hangingPunct="1">
-        <a:defRPr sz="661" kern="1200">
+      <a:lvl5pPr marL="527975" algn="l" defTabSz="263987" rtl="0" eaLnBrk="1" latinLnBrk="0" hangingPunct="1">
+        <a:defRPr sz="520" kern="1200">
           <a:solidFill>
             <a:schemeClr val="tx1"/>
           </a:solidFill>
@@ -2907,8 +2912,8 @@
           <a:cs typeface="+mn-cs"/>
         </a:defRPr>
       </a:lvl5pPr>
-      <a:lvl6pPr marL="839876" algn="l" defTabSz="335951" rtl="0" eaLnBrk="1" latinLnBrk="0" hangingPunct="1">
-        <a:defRPr sz="661" kern="1200">
+      <a:lvl6pPr marL="659968" algn="l" defTabSz="263987" rtl="0" eaLnBrk="1" latinLnBrk="0" hangingPunct="1">
+        <a:defRPr sz="520" kern="1200">
           <a:solidFill>
             <a:schemeClr val="tx1"/>
           </a:solidFill>
@@ -2917,8 +2922,8 @@
           <a:cs typeface="+mn-cs"/>
         </a:defRPr>
       </a:lvl6pPr>
-      <a:lvl7pPr marL="1007852" algn="l" defTabSz="335951" rtl="0" eaLnBrk="1" latinLnBrk="0" hangingPunct="1">
-        <a:defRPr sz="661" kern="1200">
+      <a:lvl7pPr marL="791962" algn="l" defTabSz="263987" rtl="0" eaLnBrk="1" latinLnBrk="0" hangingPunct="1">
+        <a:defRPr sz="520" kern="1200">
           <a:solidFill>
             <a:schemeClr val="tx1"/>
           </a:solidFill>
@@ -2927,8 +2932,8 @@
           <a:cs typeface="+mn-cs"/>
         </a:defRPr>
       </a:lvl7pPr>
-      <a:lvl8pPr marL="1175827" algn="l" defTabSz="335951" rtl="0" eaLnBrk="1" latinLnBrk="0" hangingPunct="1">
-        <a:defRPr sz="661" kern="1200">
+      <a:lvl8pPr marL="923955" algn="l" defTabSz="263987" rtl="0" eaLnBrk="1" latinLnBrk="0" hangingPunct="1">
+        <a:defRPr sz="520" kern="1200">
           <a:solidFill>
             <a:schemeClr val="tx1"/>
           </a:solidFill>
@@ -2937,8 +2942,8 @@
           <a:cs typeface="+mn-cs"/>
         </a:defRPr>
       </a:lvl8pPr>
-      <a:lvl9pPr marL="1343802" algn="l" defTabSz="335951" rtl="0" eaLnBrk="1" latinLnBrk="0" hangingPunct="1">
-        <a:defRPr sz="661" kern="1200">
+      <a:lvl9pPr marL="1055949" algn="l" defTabSz="263987" rtl="0" eaLnBrk="1" latinLnBrk="0" hangingPunct="1">
+        <a:defRPr sz="520" kern="1200">
           <a:solidFill>
             <a:schemeClr val="tx1"/>
           </a:solidFill>
@@ -2990,7 +2995,7 @@
         </p:blipFill>
         <p:spPr>
           <a:xfrm>
-            <a:off x="2551897" y="37425"/>
+            <a:off x="1855778" y="-232450"/>
             <a:ext cx="7088208" cy="2446704"/>
           </a:xfrm>
           <a:prstGeom prst="rect">
@@ -3028,35 +3033,187 @@
           <a:chExt cx="0" cy="0"/>
         </a:xfrm>
       </p:grpSpPr>
-      <p:pic>
-        <p:nvPicPr>
-          <p:cNvPr id="4" name="圖片 3">
+      <p:grpSp>
+        <p:nvGrpSpPr>
+          <p:cNvPr id="2" name="群組 1">
             <a:extLst>
               <a:ext uri="{FF2B5EF4-FFF2-40B4-BE49-F238E27FC236}">
-                <a16:creationId xmlns:a16="http://schemas.microsoft.com/office/drawing/2014/main" id="{D189FF1E-C110-4542-8F93-6B0320D46D25}"/>
+                <a16:creationId xmlns:a16="http://schemas.microsoft.com/office/drawing/2014/main" id="{3739EF2F-CF74-4346-9624-197A5C44F10C}"/>
               </a:ext>
             </a:extLst>
           </p:cNvPr>
-          <p:cNvPicPr>
-            <a:picLocks noChangeAspect="1"/>
-          </p:cNvPicPr>
+          <p:cNvGrpSpPr/>
           <p:nvPr/>
-        </p:nvPicPr>
-        <p:blipFill rotWithShape="1">
-          <a:blip r:embed="rId2"/>
-          <a:srcRect b="43352"/>
-          <a:stretch/>
-        </p:blipFill>
-        <p:spPr>
+        </p:nvGrpSpPr>
+        <p:grpSpPr>
           <a:xfrm>
-            <a:off x="142026" y="96513"/>
-            <a:ext cx="11907948" cy="2326336"/>
+            <a:off x="81756" y="-55328"/>
+            <a:ext cx="10636250" cy="2090268"/>
+            <a:chOff x="444500" y="132232"/>
+            <a:chExt cx="10636250" cy="2090268"/>
           </a:xfrm>
-          <a:prstGeom prst="rect">
-            <a:avLst/>
-          </a:prstGeom>
-        </p:spPr>
-      </p:pic>
+        </p:grpSpPr>
+        <p:pic>
+          <p:nvPicPr>
+            <p:cNvPr id="4" name="圖片 3">
+              <a:extLst>
+                <a:ext uri="{FF2B5EF4-FFF2-40B4-BE49-F238E27FC236}">
+                  <a16:creationId xmlns:a16="http://schemas.microsoft.com/office/drawing/2014/main" id="{D189FF1E-C110-4542-8F93-6B0320D46D25}"/>
+                </a:ext>
+              </a:extLst>
+            </p:cNvPr>
+            <p:cNvPicPr>
+              <a:picLocks noChangeAspect="1"/>
+            </p:cNvPicPr>
+            <p:nvPr/>
+          </p:nvPicPr>
+          <p:blipFill rotWithShape="1">
+            <a:blip r:embed="rId2">
+              <a:clrChange>
+                <a:clrFrom>
+                  <a:srgbClr val="FBFCFD"/>
+                </a:clrFrom>
+                <a:clrTo>
+                  <a:srgbClr val="FBFCFD">
+                    <a:alpha val="0"/>
+                  </a:srgbClr>
+                </a:clrTo>
+              </a:clrChange>
+            </a:blip>
+            <a:srcRect l="2540" r="69517" b="53140"/>
+            <a:stretch/>
+          </p:blipFill>
+          <p:spPr>
+            <a:xfrm>
+              <a:off x="444500" y="202876"/>
+              <a:ext cx="3327400" cy="1924374"/>
+            </a:xfrm>
+            <a:prstGeom prst="rect">
+              <a:avLst/>
+            </a:prstGeom>
+          </p:spPr>
+        </p:pic>
+        <p:pic>
+          <p:nvPicPr>
+            <p:cNvPr id="3" name="圖片 2">
+              <a:extLst>
+                <a:ext uri="{FF2B5EF4-FFF2-40B4-BE49-F238E27FC236}">
+                  <a16:creationId xmlns:a16="http://schemas.microsoft.com/office/drawing/2014/main" id="{C199C7C0-6073-4FA3-9C30-AECADAB74EE2}"/>
+                </a:ext>
+              </a:extLst>
+            </p:cNvPr>
+            <p:cNvPicPr>
+              <a:picLocks noChangeAspect="1"/>
+            </p:cNvPicPr>
+            <p:nvPr/>
+          </p:nvPicPr>
+          <p:blipFill rotWithShape="1">
+            <a:blip r:embed="rId2">
+              <a:clrChange>
+                <a:clrFrom>
+                  <a:srgbClr val="FBFCFD"/>
+                </a:clrFrom>
+                <a:clrTo>
+                  <a:srgbClr val="FBFCFD">
+                    <a:alpha val="0"/>
+                  </a:srgbClr>
+                </a:clrTo>
+              </a:clrChange>
+            </a:blip>
+            <a:srcRect l="51920" r="20564" b="50975"/>
+            <a:stretch/>
+          </p:blipFill>
+          <p:spPr>
+            <a:xfrm>
+              <a:off x="6187440" y="209226"/>
+              <a:ext cx="3276600" cy="2013274"/>
+            </a:xfrm>
+            <a:prstGeom prst="rect">
+              <a:avLst/>
+            </a:prstGeom>
+          </p:spPr>
+        </p:pic>
+        <p:pic>
+          <p:nvPicPr>
+            <p:cNvPr id="5" name="圖片 4">
+              <a:extLst>
+                <a:ext uri="{FF2B5EF4-FFF2-40B4-BE49-F238E27FC236}">
+                  <a16:creationId xmlns:a16="http://schemas.microsoft.com/office/drawing/2014/main" id="{8E1B753E-D345-4800-8E77-D748A022F91E}"/>
+                </a:ext>
+              </a:extLst>
+            </p:cNvPr>
+            <p:cNvPicPr>
+              <a:picLocks noChangeAspect="1"/>
+            </p:cNvPicPr>
+            <p:nvPr/>
+          </p:nvPicPr>
+          <p:blipFill rotWithShape="1">
+            <a:blip r:embed="rId2">
+              <a:clrChange>
+                <a:clrFrom>
+                  <a:srgbClr val="FBFCFD"/>
+                </a:clrFrom>
+                <a:clrTo>
+                  <a:srgbClr val="FBFCFD">
+                    <a:alpha val="0"/>
+                  </a:srgbClr>
+                </a:clrTo>
+              </a:clrChange>
+            </a:blip>
+            <a:srcRect l="30589" t="10060" r="51920" b="43351"/>
+            <a:stretch/>
+          </p:blipFill>
+          <p:spPr>
+            <a:xfrm>
+              <a:off x="3470275" y="132232"/>
+              <a:ext cx="2082800" cy="1913262"/>
+            </a:xfrm>
+            <a:prstGeom prst="rect">
+              <a:avLst/>
+            </a:prstGeom>
+          </p:spPr>
+        </p:pic>
+        <p:pic>
+          <p:nvPicPr>
+            <p:cNvPr id="6" name="圖片 5">
+              <a:extLst>
+                <a:ext uri="{FF2B5EF4-FFF2-40B4-BE49-F238E27FC236}">
+                  <a16:creationId xmlns:a16="http://schemas.microsoft.com/office/drawing/2014/main" id="{2DF6EF97-467C-4BE3-95D0-BCCF5E387C09}"/>
+                </a:ext>
+              </a:extLst>
+            </p:cNvPr>
+            <p:cNvPicPr>
+              <a:picLocks noChangeAspect="1"/>
+            </p:cNvPicPr>
+            <p:nvPr/>
+          </p:nvPicPr>
+          <p:blipFill rotWithShape="1">
+            <a:blip r:embed="rId2">
+              <a:clrChange>
+                <a:clrFrom>
+                  <a:srgbClr val="FBFCFD"/>
+                </a:clrFrom>
+                <a:clrTo>
+                  <a:srgbClr val="FBFCFD">
+                    <a:alpha val="0"/>
+                  </a:srgbClr>
+                </a:clrTo>
+              </a:clrChange>
+            </a:blip>
+            <a:srcRect l="80289" t="10060" r="2647" b="43351"/>
+            <a:stretch/>
+          </p:blipFill>
+          <p:spPr>
+            <a:xfrm>
+              <a:off x="9048750" y="138582"/>
+              <a:ext cx="2032000" cy="1913262"/>
+            </a:xfrm>
+            <a:prstGeom prst="rect">
+              <a:avLst/>
+            </a:prstGeom>
+          </p:spPr>
+        </p:pic>
+      </p:grpSp>
     </p:spTree>
     <p:extLst>
       <p:ext uri="{BB962C8B-B14F-4D97-AF65-F5344CB8AC3E}">
